--- a/3-Documentation/Application Météo.pptx
+++ b/3-Documentation/Application Météo.pptx
@@ -5,23 +5,24 @@
     <p:sldMasterId id="2147483648" r:id="rId4"/>
   </p:sldMasterIdLst>
   <p:notesMasterIdLst>
-    <p:notesMasterId r:id="rId16"/>
+    <p:notesMasterId r:id="rId17"/>
   </p:notesMasterIdLst>
   <p:handoutMasterIdLst>
-    <p:handoutMasterId r:id="rId17"/>
+    <p:handoutMasterId r:id="rId18"/>
   </p:handoutMasterIdLst>
   <p:sldIdLst>
     <p:sldId id="256" r:id="rId5"/>
     <p:sldId id="278" r:id="rId6"/>
     <p:sldId id="277" r:id="rId7"/>
-    <p:sldId id="280" r:id="rId8"/>
-    <p:sldId id="281" r:id="rId9"/>
-    <p:sldId id="282" r:id="rId10"/>
-    <p:sldId id="283" r:id="rId11"/>
-    <p:sldId id="284" r:id="rId12"/>
-    <p:sldId id="285" r:id="rId13"/>
-    <p:sldId id="286" r:id="rId14"/>
-    <p:sldId id="287" r:id="rId15"/>
+    <p:sldId id="288" r:id="rId8"/>
+    <p:sldId id="280" r:id="rId9"/>
+    <p:sldId id="281" r:id="rId10"/>
+    <p:sldId id="282" r:id="rId11"/>
+    <p:sldId id="283" r:id="rId12"/>
+    <p:sldId id="284" r:id="rId13"/>
+    <p:sldId id="285" r:id="rId14"/>
+    <p:sldId id="286" r:id="rId15"/>
+    <p:sldId id="287" r:id="rId16"/>
   </p:sldIdLst>
   <p:sldSz cx="12192000" cy="6858000"/>
   <p:notesSz cx="6858000" cy="9144000"/>
@@ -952,7 +953,7 @@
             <a:pPr rtl="0"/>
             <a:fld id="{4B725628-3A68-42F4-BA86-981817953149}" type="slidenum">
               <a:rPr lang="fr-FR" noProof="0" smtClean="0"/>
-              <a:t>4</a:t>
+              <a:t>5</a:t>
             </a:fld>
             <a:endParaRPr lang="fr-FR" noProof="0"/>
           </a:p>
@@ -21750,6 +21751,154 @@
       </p:grpSpPr>
       <p:sp>
         <p:nvSpPr>
+          <p:cNvPr id="2" name="Titre 1">
+            <a:extLst>
+              <a:ext uri="{FF2B5EF4-FFF2-40B4-BE49-F238E27FC236}">
+                <a16:creationId xmlns:a16="http://schemas.microsoft.com/office/drawing/2014/main" id="{B66DF887-205E-0B01-68A1-4624875110AE}"/>
+              </a:ext>
+            </a:extLst>
+          </p:cNvPr>
+          <p:cNvSpPr>
+            <a:spLocks noGrp="1"/>
+          </p:cNvSpPr>
+          <p:nvPr>
+            <p:ph type="title"/>
+          </p:nvPr>
+        </p:nvSpPr>
+        <p:spPr/>
+        <p:txBody>
+          <a:bodyPr/>
+          <a:lstStyle/>
+          <a:p>
+            <a:r>
+              <a:rPr lang="fr-FR" dirty="0" err="1"/>
+              <a:t>Prometheus</a:t>
+            </a:r>
+            <a:r>
+              <a:rPr lang="fr-FR" dirty="0"/>
+              <a:t> pour la Surveillance</a:t>
+            </a:r>
+          </a:p>
+        </p:txBody>
+      </p:sp>
+      <p:sp>
+        <p:nvSpPr>
+          <p:cNvPr id="3" name="Espace réservé du contenu 2">
+            <a:extLst>
+              <a:ext uri="{FF2B5EF4-FFF2-40B4-BE49-F238E27FC236}">
+                <a16:creationId xmlns:a16="http://schemas.microsoft.com/office/drawing/2014/main" id="{7260356D-7965-4A5F-25BD-B630EAC8DAC4}"/>
+              </a:ext>
+            </a:extLst>
+          </p:cNvPr>
+          <p:cNvSpPr>
+            <a:spLocks noGrp="1"/>
+          </p:cNvSpPr>
+          <p:nvPr>
+            <p:ph idx="1"/>
+          </p:nvPr>
+        </p:nvSpPr>
+        <p:spPr/>
+        <p:txBody>
+          <a:bodyPr/>
+          <a:lstStyle/>
+          <a:p>
+            <a:r>
+              <a:rPr lang="fr-FR" dirty="0"/>
+              <a:t>L’application collecte et analyse les métriques système avec </a:t>
+            </a:r>
+            <a:r>
+              <a:rPr lang="fr-FR" dirty="0" err="1"/>
+              <a:t>Prometheus</a:t>
+            </a:r>
+            <a:r>
+              <a:rPr lang="fr-FR" dirty="0"/>
+              <a:t> :</a:t>
+            </a:r>
+          </a:p>
+          <a:p>
+            <a:r>
+              <a:rPr lang="fr-FR" dirty="0"/>
+              <a:t>- Nombre total de requêtes HTTP</a:t>
+            </a:r>
+          </a:p>
+          <a:p>
+            <a:r>
+              <a:rPr lang="fr-FR" dirty="0"/>
+              <a:t>- Temps de réponse moyen</a:t>
+            </a:r>
+          </a:p>
+          <a:p>
+            <a:r>
+              <a:rPr lang="fr-FR" dirty="0"/>
+              <a:t>- Nombre total d’erreurs</a:t>
+            </a:r>
+          </a:p>
+          <a:p>
+            <a:r>
+              <a:rPr lang="fr-FR" dirty="0"/>
+              <a:t>- Nombre de requêtes de prévision</a:t>
+            </a:r>
+          </a:p>
+          <a:p>
+            <a:r>
+              <a:rPr lang="fr-FR" dirty="0"/>
+              <a:t>- Feedbacks reçus</a:t>
+            </a:r>
+          </a:p>
+          <a:p>
+            <a:endParaRPr lang="fr-FR" dirty="0"/>
+          </a:p>
+          <a:p>
+            <a:r>
+              <a:rPr lang="fr-FR" dirty="0"/>
+              <a:t>Les données peuvent être visualisées via </a:t>
+            </a:r>
+            <a:r>
+              <a:rPr lang="fr-FR" dirty="0" err="1"/>
+              <a:t>Grafana</a:t>
+            </a:r>
+            <a:r>
+              <a:rPr lang="fr-FR" dirty="0"/>
+              <a:t>.</a:t>
+            </a:r>
+          </a:p>
+          <a:p>
+            <a:endParaRPr lang="fr-FR" dirty="0"/>
+          </a:p>
+        </p:txBody>
+      </p:sp>
+    </p:spTree>
+    <p:extLst>
+      <p:ext uri="{BB962C8B-B14F-4D97-AF65-F5344CB8AC3E}">
+        <p14:creationId xmlns:p14="http://schemas.microsoft.com/office/powerpoint/2010/main" val="2495648346"/>
+      </p:ext>
+    </p:extLst>
+  </p:cSld>
+  <p:clrMapOvr>
+    <a:masterClrMapping/>
+  </p:clrMapOvr>
+</p:sld>
+</file>
+
+<file path=ppt/slides/slide11.xml><?xml version="1.0" encoding="utf-8"?>
+<p:sld xmlns:a="http://schemas.openxmlformats.org/drawingml/2006/main" xmlns:r="http://schemas.openxmlformats.org/officeDocument/2006/relationships" xmlns:p="http://schemas.openxmlformats.org/presentationml/2006/main">
+  <p:cSld>
+    <p:spTree>
+      <p:nvGrpSpPr>
+        <p:cNvPr id="1" name=""/>
+        <p:cNvGrpSpPr/>
+        <p:nvPr/>
+      </p:nvGrpSpPr>
+      <p:grpSpPr>
+        <a:xfrm>
+          <a:off x="0" y="0"/>
+          <a:ext cx="0" cy="0"/>
+          <a:chOff x="0" y="0"/>
+          <a:chExt cx="0" cy="0"/>
+        </a:xfrm>
+      </p:grpSpPr>
+      <p:sp>
+        <p:nvSpPr>
           <p:cNvPr id="10" name="Title 1">
             <a:extLst>
               <a:ext uri="{FF2B5EF4-FFF2-40B4-BE49-F238E27FC236}">
@@ -21828,7 +21977,7 @@
 </p:sld>
 </file>
 
-<file path=ppt/slides/slide11.xml><?xml version="1.0" encoding="utf-8"?>
+<file path=ppt/slides/slide12.xml><?xml version="1.0" encoding="utf-8"?>
 <p:sld xmlns:a="http://schemas.openxmlformats.org/drawingml/2006/main" xmlns:r="http://schemas.openxmlformats.org/officeDocument/2006/relationships" xmlns:p="http://schemas.openxmlformats.org/presentationml/2006/main">
   <p:cSld>
     <p:spTree>
@@ -22222,6 +22371,67 @@
           <a:chExt cx="0" cy="0"/>
         </a:xfrm>
       </p:grpSpPr>
+      <p:pic>
+        <p:nvPicPr>
+          <p:cNvPr id="5" name="Image 4">
+            <a:extLst>
+              <a:ext uri="{FF2B5EF4-FFF2-40B4-BE49-F238E27FC236}">
+                <a16:creationId xmlns:a16="http://schemas.microsoft.com/office/drawing/2014/main" id="{829789C9-6E41-7A27-1A2D-0D6BAA9378BF}"/>
+              </a:ext>
+            </a:extLst>
+          </p:cNvPr>
+          <p:cNvPicPr>
+            <a:picLocks noChangeAspect="1"/>
+          </p:cNvPicPr>
+          <p:nvPr/>
+        </p:nvPicPr>
+        <p:blipFill>
+          <a:blip r:embed="rId2"/>
+          <a:stretch>
+            <a:fillRect/>
+          </a:stretch>
+        </p:blipFill>
+        <p:spPr>
+          <a:xfrm>
+            <a:off x="1460974" y="68263"/>
+            <a:ext cx="10032051" cy="6721475"/>
+          </a:xfrm>
+          <a:prstGeom prst="rect">
+            <a:avLst/>
+          </a:prstGeom>
+          <a:noFill/>
+        </p:spPr>
+      </p:pic>
+    </p:spTree>
+    <p:extLst>
+      <p:ext uri="{BB962C8B-B14F-4D97-AF65-F5344CB8AC3E}">
+        <p14:creationId xmlns:p14="http://schemas.microsoft.com/office/powerpoint/2010/main" val="329136302"/>
+      </p:ext>
+    </p:extLst>
+  </p:cSld>
+  <p:clrMapOvr>
+    <a:masterClrMapping/>
+  </p:clrMapOvr>
+</p:sld>
+</file>
+
+<file path=ppt/slides/slide5.xml><?xml version="1.0" encoding="utf-8"?>
+<p:sld xmlns:a="http://schemas.openxmlformats.org/drawingml/2006/main" xmlns:r="http://schemas.openxmlformats.org/officeDocument/2006/relationships" xmlns:p="http://schemas.openxmlformats.org/presentationml/2006/main">
+  <p:cSld>
+    <p:spTree>
+      <p:nvGrpSpPr>
+        <p:cNvPr id="1" name=""/>
+        <p:cNvGrpSpPr/>
+        <p:nvPr/>
+      </p:nvGrpSpPr>
+      <p:grpSpPr>
+        <a:xfrm>
+          <a:off x="0" y="0"/>
+          <a:ext cx="0" cy="0"/>
+          <a:chOff x="0" y="0"/>
+          <a:chExt cx="0" cy="0"/>
+        </a:xfrm>
+      </p:grpSpPr>
       <p:sp>
         <p:nvSpPr>
           <p:cNvPr id="2" name="Titre 1">
@@ -22385,7 +22595,7 @@
 </p:sld>
 </file>
 
-<file path=ppt/slides/slide5.xml><?xml version="1.0" encoding="utf-8"?>
+<file path=ppt/slides/slide6.xml><?xml version="1.0" encoding="utf-8"?>
 <p:sld xmlns:a="http://schemas.openxmlformats.org/drawingml/2006/main" xmlns:r="http://schemas.openxmlformats.org/officeDocument/2006/relationships" xmlns:p="http://schemas.openxmlformats.org/presentationml/2006/main">
   <p:cSld>
     <p:spTree>
@@ -22526,7 +22736,7 @@
 </p:sld>
 </file>
 
-<file path=ppt/slides/slide6.xml><?xml version="1.0" encoding="utf-8"?>
+<file path=ppt/slides/slide7.xml><?xml version="1.0" encoding="utf-8"?>
 <p:sld xmlns:a="http://schemas.openxmlformats.org/drawingml/2006/main" xmlns:r="http://schemas.openxmlformats.org/officeDocument/2006/relationships" xmlns:p="http://schemas.openxmlformats.org/presentationml/2006/main">
   <p:cSld>
     <p:spTree>
@@ -22655,7 +22865,7 @@
 </p:sld>
 </file>
 
-<file path=ppt/slides/slide7.xml><?xml version="1.0" encoding="utf-8"?>
+<file path=ppt/slides/slide8.xml><?xml version="1.0" encoding="utf-8"?>
 <p:sld xmlns:a="http://schemas.openxmlformats.org/drawingml/2006/main" xmlns:r="http://schemas.openxmlformats.org/officeDocument/2006/relationships" xmlns:p="http://schemas.openxmlformats.org/presentationml/2006/main">
   <p:cSld>
     <p:spTree>
@@ -22785,7 +22995,7 @@
 </p:sld>
 </file>
 
-<file path=ppt/slides/slide8.xml><?xml version="1.0" encoding="utf-8"?>
+<file path=ppt/slides/slide9.xml><?xml version="1.0" encoding="utf-8"?>
 <p:sld xmlns:a="http://schemas.openxmlformats.org/drawingml/2006/main" xmlns:r="http://schemas.openxmlformats.org/officeDocument/2006/relationships" xmlns:p="http://schemas.openxmlformats.org/presentationml/2006/main">
   <p:cSld>
     <p:spTree>
@@ -22874,12 +23084,6 @@
             </a:r>
           </a:p>
           <a:p>
-            <a:r>
-              <a:rPr lang="fr-FR" dirty="0"/>
-              <a:t>- Logs d’utilisation</a:t>
-            </a:r>
-          </a:p>
-          <a:p>
             <a:endParaRPr lang="fr-FR" dirty="0"/>
           </a:p>
         </p:txBody>
@@ -22888,154 +23092,6 @@
     <p:extLst>
       <p:ext uri="{BB962C8B-B14F-4D97-AF65-F5344CB8AC3E}">
         <p14:creationId xmlns:p14="http://schemas.microsoft.com/office/powerpoint/2010/main" val="1416496782"/>
-      </p:ext>
-    </p:extLst>
-  </p:cSld>
-  <p:clrMapOvr>
-    <a:masterClrMapping/>
-  </p:clrMapOvr>
-</p:sld>
-</file>
-
-<file path=ppt/slides/slide9.xml><?xml version="1.0" encoding="utf-8"?>
-<p:sld xmlns:a="http://schemas.openxmlformats.org/drawingml/2006/main" xmlns:r="http://schemas.openxmlformats.org/officeDocument/2006/relationships" xmlns:p="http://schemas.openxmlformats.org/presentationml/2006/main">
-  <p:cSld>
-    <p:spTree>
-      <p:nvGrpSpPr>
-        <p:cNvPr id="1" name=""/>
-        <p:cNvGrpSpPr/>
-        <p:nvPr/>
-      </p:nvGrpSpPr>
-      <p:grpSpPr>
-        <a:xfrm>
-          <a:off x="0" y="0"/>
-          <a:ext cx="0" cy="0"/>
-          <a:chOff x="0" y="0"/>
-          <a:chExt cx="0" cy="0"/>
-        </a:xfrm>
-      </p:grpSpPr>
-      <p:sp>
-        <p:nvSpPr>
-          <p:cNvPr id="2" name="Titre 1">
-            <a:extLst>
-              <a:ext uri="{FF2B5EF4-FFF2-40B4-BE49-F238E27FC236}">
-                <a16:creationId xmlns:a16="http://schemas.microsoft.com/office/drawing/2014/main" id="{B66DF887-205E-0B01-68A1-4624875110AE}"/>
-              </a:ext>
-            </a:extLst>
-          </p:cNvPr>
-          <p:cNvSpPr>
-            <a:spLocks noGrp="1"/>
-          </p:cNvSpPr>
-          <p:nvPr>
-            <p:ph type="title"/>
-          </p:nvPr>
-        </p:nvSpPr>
-        <p:spPr/>
-        <p:txBody>
-          <a:bodyPr/>
-          <a:lstStyle/>
-          <a:p>
-            <a:r>
-              <a:rPr lang="fr-FR" dirty="0" err="1"/>
-              <a:t>Prometheus</a:t>
-            </a:r>
-            <a:r>
-              <a:rPr lang="fr-FR" dirty="0"/>
-              <a:t> pour la Surveillance</a:t>
-            </a:r>
-          </a:p>
-        </p:txBody>
-      </p:sp>
-      <p:sp>
-        <p:nvSpPr>
-          <p:cNvPr id="3" name="Espace réservé du contenu 2">
-            <a:extLst>
-              <a:ext uri="{FF2B5EF4-FFF2-40B4-BE49-F238E27FC236}">
-                <a16:creationId xmlns:a16="http://schemas.microsoft.com/office/drawing/2014/main" id="{7260356D-7965-4A5F-25BD-B630EAC8DAC4}"/>
-              </a:ext>
-            </a:extLst>
-          </p:cNvPr>
-          <p:cNvSpPr>
-            <a:spLocks noGrp="1"/>
-          </p:cNvSpPr>
-          <p:nvPr>
-            <p:ph idx="1"/>
-          </p:nvPr>
-        </p:nvSpPr>
-        <p:spPr/>
-        <p:txBody>
-          <a:bodyPr/>
-          <a:lstStyle/>
-          <a:p>
-            <a:r>
-              <a:rPr lang="fr-FR" dirty="0"/>
-              <a:t>L’application collecte et analyse les métriques système avec </a:t>
-            </a:r>
-            <a:r>
-              <a:rPr lang="fr-FR" dirty="0" err="1"/>
-              <a:t>Prometheus</a:t>
-            </a:r>
-            <a:r>
-              <a:rPr lang="fr-FR" dirty="0"/>
-              <a:t> :</a:t>
-            </a:r>
-          </a:p>
-          <a:p>
-            <a:r>
-              <a:rPr lang="fr-FR" dirty="0"/>
-              <a:t>- Nombre total de requêtes HTTP</a:t>
-            </a:r>
-          </a:p>
-          <a:p>
-            <a:r>
-              <a:rPr lang="fr-FR" dirty="0"/>
-              <a:t>- Temps de réponse moyen</a:t>
-            </a:r>
-          </a:p>
-          <a:p>
-            <a:r>
-              <a:rPr lang="fr-FR" dirty="0"/>
-              <a:t>- Nombre total d’erreurs</a:t>
-            </a:r>
-          </a:p>
-          <a:p>
-            <a:r>
-              <a:rPr lang="fr-FR" dirty="0"/>
-              <a:t>- Nombre de requêtes de prévision</a:t>
-            </a:r>
-          </a:p>
-          <a:p>
-            <a:r>
-              <a:rPr lang="fr-FR" dirty="0"/>
-              <a:t>- Feedbacks reçus</a:t>
-            </a:r>
-          </a:p>
-          <a:p>
-            <a:endParaRPr lang="fr-FR" dirty="0"/>
-          </a:p>
-          <a:p>
-            <a:r>
-              <a:rPr lang="fr-FR" dirty="0"/>
-              <a:t>Les données peuvent être visualisées via </a:t>
-            </a:r>
-            <a:r>
-              <a:rPr lang="fr-FR" dirty="0" err="1"/>
-              <a:t>Grafana</a:t>
-            </a:r>
-            <a:r>
-              <a:rPr lang="fr-FR" dirty="0"/>
-              <a:t>.</a:t>
-            </a:r>
-          </a:p>
-          <a:p>
-            <a:endParaRPr lang="fr-FR" dirty="0"/>
-          </a:p>
-        </p:txBody>
-      </p:sp>
-    </p:spTree>
-    <p:extLst>
-      <p:ext uri="{BB962C8B-B14F-4D97-AF65-F5344CB8AC3E}">
-        <p14:creationId xmlns:p14="http://schemas.microsoft.com/office/powerpoint/2010/main" val="2495648346"/>
       </p:ext>
     </p:extLst>
   </p:cSld>

--- a/3-Documentation/Application Météo.pptx
+++ b/3-Documentation/Application Météo.pptx
@@ -931,7 +931,42 @@
                 <a:latin typeface="gg sans"/>
               </a:rPr>
             </a:br>
-            <a:endParaRPr lang="fr-FR" dirty="0"/>
+            <a:r>
+              <a:rPr lang="fr-FR" dirty="0"/>
+              <a:t>Un </a:t>
+            </a:r>
+            <a:r>
+              <a:rPr lang="fr-FR" dirty="0" err="1"/>
+              <a:t>endpoint</a:t>
+            </a:r>
+            <a:r>
+              <a:rPr lang="fr-FR" dirty="0"/>
+              <a:t>, dans le cadre d’une API telle que celle de </a:t>
+            </a:r>
+            <a:r>
+              <a:rPr lang="fr-FR" dirty="0" err="1"/>
+              <a:t>Nominatim</a:t>
+            </a:r>
+            <a:r>
+              <a:rPr lang="fr-FR" dirty="0"/>
+              <a:t>, désigne une adresse (URL) précise qui reçoit et traite une requête pour fournir une réponse au format JSON, XML ou autre. Par exemple, </a:t>
+            </a:r>
+            <a:r>
+              <a:rPr lang="fr-FR" dirty="0" err="1"/>
+              <a:t>l’endpoint</a:t>
+            </a:r>
+            <a:r>
+              <a:rPr lang="fr-FR" dirty="0"/>
+              <a:t> “/</a:t>
+            </a:r>
+            <a:r>
+              <a:rPr lang="fr-FR" dirty="0" err="1"/>
+              <a:t>search</a:t>
+            </a:r>
+            <a:r>
+              <a:rPr lang="fr-FR" dirty="0"/>
+              <a:t>” sert à la recherche d’adresses (géocodage), tandis que “/reverse” retourne une adresse à partir de coordonnées géographiques (reverse géocodage).</a:t>
+            </a:r>
           </a:p>
         </p:txBody>
       </p:sp>
@@ -963,6 +998,106 @@
     <p:extLst>
       <p:ext uri="{BB962C8B-B14F-4D97-AF65-F5344CB8AC3E}">
         <p14:creationId xmlns:p14="http://schemas.microsoft.com/office/powerpoint/2010/main" val="646509585"/>
+      </p:ext>
+    </p:extLst>
+  </p:cSld>
+  <p:clrMapOvr>
+    <a:masterClrMapping/>
+  </p:clrMapOvr>
+</p:notes>
+</file>
+
+<file path=ppt/notesSlides/notesSlide4.xml><?xml version="1.0" encoding="utf-8"?>
+<p:notes xmlns:a="http://schemas.openxmlformats.org/drawingml/2006/main" xmlns:r="http://schemas.openxmlformats.org/officeDocument/2006/relationships" xmlns:p="http://schemas.openxmlformats.org/presentationml/2006/main">
+  <p:cSld>
+    <p:spTree>
+      <p:nvGrpSpPr>
+        <p:cNvPr id="1" name=""/>
+        <p:cNvGrpSpPr/>
+        <p:nvPr/>
+      </p:nvGrpSpPr>
+      <p:grpSpPr>
+        <a:xfrm>
+          <a:off x="0" y="0"/>
+          <a:ext cx="0" cy="0"/>
+          <a:chOff x="0" y="0"/>
+          <a:chExt cx="0" cy="0"/>
+        </a:xfrm>
+      </p:grpSpPr>
+      <p:sp>
+        <p:nvSpPr>
+          <p:cNvPr id="2" name="Espace réservé de l'image des diapositives 1"/>
+          <p:cNvSpPr>
+            <a:spLocks noGrp="1" noRot="1" noChangeAspect="1"/>
+          </p:cNvSpPr>
+          <p:nvPr>
+            <p:ph type="sldImg"/>
+          </p:nvPr>
+        </p:nvSpPr>
+        <p:spPr/>
+      </p:sp>
+      <p:sp>
+        <p:nvSpPr>
+          <p:cNvPr id="3" name="Espace réservé des notes 2"/>
+          <p:cNvSpPr>
+            <a:spLocks noGrp="1"/>
+          </p:cNvSpPr>
+          <p:nvPr>
+            <p:ph type="body" idx="1"/>
+          </p:nvPr>
+        </p:nvSpPr>
+        <p:spPr/>
+        <p:txBody>
+          <a:bodyPr/>
+          <a:lstStyle/>
+          <a:p>
+            <a:r>
+              <a:rPr lang="fr-FR" dirty="0" err="1"/>
+              <a:t>Nominatim</a:t>
+            </a:r>
+            <a:r>
+              <a:rPr lang="fr-FR" dirty="0"/>
+              <a:t> est un service de géocodage open source reposant sur les données collaboratives d’</a:t>
+            </a:r>
+            <a:r>
+              <a:rPr lang="fr-FR" dirty="0" err="1"/>
+              <a:t>OpenStreetMap</a:t>
+            </a:r>
+            <a:r>
+              <a:rPr lang="fr-FR" dirty="0"/>
+              <a:t>, capable de transformer des adresses ou descriptions textuelles en coordonnées géographiques et, inversement, de fournir des adresses à partir de points sur une carte. Son caractère libre et sa richesse de données mises à jour en continu en font une alternative solide aux solutions propriétaires, généralement privilégiée pour les projets nécessitant une intégration flexible et personnalisable.</a:t>
+            </a:r>
+          </a:p>
+        </p:txBody>
+      </p:sp>
+      <p:sp>
+        <p:nvSpPr>
+          <p:cNvPr id="4" name="Espace réservé du numéro de diapositive 3"/>
+          <p:cNvSpPr>
+            <a:spLocks noGrp="1"/>
+          </p:cNvSpPr>
+          <p:nvPr>
+            <p:ph type="sldNum" sz="quarter" idx="5"/>
+          </p:nvPr>
+        </p:nvSpPr>
+        <p:spPr/>
+        <p:txBody>
+          <a:bodyPr/>
+          <a:lstStyle/>
+          <a:p>
+            <a:pPr rtl="0"/>
+            <a:fld id="{4B725628-3A68-42F4-BA86-981817953149}" type="slidenum">
+              <a:rPr lang="fr-FR" noProof="0" smtClean="0"/>
+              <a:t>8</a:t>
+            </a:fld>
+            <a:endParaRPr lang="fr-FR" noProof="0"/>
+          </a:p>
+        </p:txBody>
+      </p:sp>
+    </p:spTree>
+    <p:extLst>
+      <p:ext uri="{BB962C8B-B14F-4D97-AF65-F5344CB8AC3E}">
+        <p14:creationId xmlns:p14="http://schemas.microsoft.com/office/powerpoint/2010/main" val="2584906784"/>
       </p:ext>
     </p:extLst>
   </p:cSld>
@@ -23926,14 +24061,6 @@
 </file>
 
 <file path=customXml/item1.xml><?xml version="1.0" encoding="utf-8"?>
-<p:properties xmlns:p="http://schemas.microsoft.com/office/2006/metadata/properties" xmlns:xsi="http://www.w3.org/2001/XMLSchema-instance" xmlns:pc="http://schemas.microsoft.com/office/infopath/2007/PartnerControls">
-  <documentManagement>
-    <MediaServiceKeyPoints xmlns="71af3243-3dd4-4a8d-8c0d-dd76da1f02a5" xsi:nil="true"/>
-  </documentManagement>
-</p:properties>
-</file>
-
-<file path=customXml/item2.xml><?xml version="1.0" encoding="utf-8"?>
 <ct:contentTypeSchema xmlns:ct="http://schemas.microsoft.com/office/2006/metadata/contentType" xmlns:ma="http://schemas.microsoft.com/office/2006/metadata/properties/metaAttributes" ct:_="" ma:_="" ma:contentTypeName="Document" ma:contentTypeID="0x01010079F111ED35F8CC479449609E8A0923A6" ma:contentTypeVersion="11" ma:contentTypeDescription="Create a new document." ma:contentTypeScope="" ma:versionID="9677210f24a1be23c92c90fd886aa0aa">
   <xsd:schema xmlns:xsd="http://www.w3.org/2001/XMLSchema" xmlns:xs="http://www.w3.org/2001/XMLSchema" xmlns:p="http://schemas.microsoft.com/office/2006/metadata/properties" xmlns:ns2="71af3243-3dd4-4a8d-8c0d-dd76da1f02a5" xmlns:ns3="16c05727-aa75-4e4a-9b5f-8a80a1165891" targetNamespace="http://schemas.microsoft.com/office/2006/metadata/properties" ma:root="true" ma:fieldsID="60e05723c5c1908df1a1a4ebf11d344e" ns2:_="" ns3:_="">
     <xsd:import namespace="71af3243-3dd4-4a8d-8c0d-dd76da1f02a5"/>
@@ -24144,6 +24271,14 @@
 </ct:contentTypeSchema>
 </file>
 
+<file path=customXml/item2.xml><?xml version="1.0" encoding="utf-8"?>
+<p:properties xmlns:p="http://schemas.microsoft.com/office/2006/metadata/properties" xmlns:xsi="http://www.w3.org/2001/XMLSchema-instance" xmlns:pc="http://schemas.microsoft.com/office/infopath/2007/PartnerControls">
+  <documentManagement>
+    <MediaServiceKeyPoints xmlns="71af3243-3dd4-4a8d-8c0d-dd76da1f02a5" xsi:nil="true"/>
+  </documentManagement>
+</p:properties>
+</file>
+
 <file path=customXml/item3.xml><?xml version="1.0" encoding="utf-8"?>
 <?mso-contentType ?>
 <FormTemplates xmlns="http://schemas.microsoft.com/sharepoint/v3/contenttype/forms">
@@ -24154,16 +24289,6 @@
 </file>
 
 <file path=customXml/itemProps1.xml><?xml version="1.0" encoding="utf-8"?>
-<ds:datastoreItem xmlns:ds="http://schemas.openxmlformats.org/officeDocument/2006/customXml" ds:itemID="{788A2F88-55C5-4ED1-9541-807C65424763}">
-  <ds:schemaRefs>
-    <ds:schemaRef ds:uri="http://schemas.microsoft.com/office/2006/metadata/properties"/>
-    <ds:schemaRef ds:uri="http://schemas.microsoft.com/office/infopath/2007/PartnerControls"/>
-    <ds:schemaRef ds:uri="71af3243-3dd4-4a8d-8c0d-dd76da1f02a5"/>
-  </ds:schemaRefs>
-</ds:datastoreItem>
-</file>
-
-<file path=customXml/itemProps2.xml><?xml version="1.0" encoding="utf-8"?>
 <ds:datastoreItem xmlns:ds="http://schemas.openxmlformats.org/officeDocument/2006/customXml" ds:itemID="{B61EAB5F-88FC-4FAE-AE3C-037A3C365EB8}">
   <ds:schemaRefs>
     <ds:schemaRef ds:uri="http://schemas.microsoft.com/office/2006/metadata/contentType"/>
@@ -24182,6 +24307,16 @@
 </ds:datastoreItem>
 </file>
 
+<file path=customXml/itemProps2.xml><?xml version="1.0" encoding="utf-8"?>
+<ds:datastoreItem xmlns:ds="http://schemas.openxmlformats.org/officeDocument/2006/customXml" ds:itemID="{788A2F88-55C5-4ED1-9541-807C65424763}">
+  <ds:schemaRefs>
+    <ds:schemaRef ds:uri="http://schemas.microsoft.com/office/2006/metadata/properties"/>
+    <ds:schemaRef ds:uri="http://schemas.microsoft.com/office/infopath/2007/PartnerControls"/>
+    <ds:schemaRef ds:uri="71af3243-3dd4-4a8d-8c0d-dd76da1f02a5"/>
+  </ds:schemaRefs>
+</ds:datastoreItem>
+</file>
+
 <file path=customXml/itemProps3.xml><?xml version="1.0" encoding="utf-8"?>
 <ds:datastoreItem xmlns:ds="http://schemas.openxmlformats.org/officeDocument/2006/customXml" ds:itemID="{4F44C90D-2A62-4985-9618-3460247437B1}">
   <ds:schemaRefs>

--- a/3-Documentation/Application Météo.pptx
+++ b/3-Documentation/Application Météo.pptx
@@ -5,24 +5,25 @@
     <p:sldMasterId id="2147483648" r:id="rId4"/>
   </p:sldMasterIdLst>
   <p:notesMasterIdLst>
-    <p:notesMasterId r:id="rId17"/>
+    <p:notesMasterId r:id="rId18"/>
   </p:notesMasterIdLst>
   <p:handoutMasterIdLst>
-    <p:handoutMasterId r:id="rId18"/>
+    <p:handoutMasterId r:id="rId19"/>
   </p:handoutMasterIdLst>
   <p:sldIdLst>
     <p:sldId id="256" r:id="rId5"/>
     <p:sldId id="278" r:id="rId6"/>
     <p:sldId id="277" r:id="rId7"/>
     <p:sldId id="288" r:id="rId8"/>
-    <p:sldId id="280" r:id="rId9"/>
-    <p:sldId id="281" r:id="rId10"/>
-    <p:sldId id="282" r:id="rId11"/>
-    <p:sldId id="283" r:id="rId12"/>
-    <p:sldId id="284" r:id="rId13"/>
-    <p:sldId id="285" r:id="rId14"/>
-    <p:sldId id="286" r:id="rId15"/>
-    <p:sldId id="287" r:id="rId16"/>
+    <p:sldId id="289" r:id="rId9"/>
+    <p:sldId id="280" r:id="rId10"/>
+    <p:sldId id="281" r:id="rId11"/>
+    <p:sldId id="282" r:id="rId12"/>
+    <p:sldId id="283" r:id="rId13"/>
+    <p:sldId id="284" r:id="rId14"/>
+    <p:sldId id="285" r:id="rId15"/>
+    <p:sldId id="286" r:id="rId16"/>
+    <p:sldId id="287" r:id="rId17"/>
   </p:sldIdLst>
   <p:sldSz cx="12192000" cy="6858000"/>
   <p:notesSz cx="6858000" cy="9144000"/>
@@ -216,7 +217,7 @@
             <a:pPr rtl="0"/>
             <a:fld id="{757FDB26-16AF-4C82-AF7A-92449513F3F4}" type="datetime1">
               <a:rPr lang="fr-FR" smtClean="0"/>
-              <a:t>03/03/2025</a:t>
+              <a:t>04/03/2025</a:t>
             </a:fld>
             <a:endParaRPr lang="fr-FR"/>
           </a:p>
@@ -386,7 +387,7 @@
             <a:pPr rtl="0"/>
             <a:fld id="{360E9541-3375-4528-AC9C-1D7FD00C3017}" type="datetime1">
               <a:rPr lang="fr-FR" noProof="0" smtClean="0"/>
-              <a:t>03/03/2025</a:t>
+              <a:t>04/03/2025</a:t>
             </a:fld>
             <a:endParaRPr lang="fr-FR" noProof="0"/>
           </a:p>
@@ -788,7 +789,7 @@
           <a:lstStyle/>
           <a:p>
             <a:pPr rtl="0"/>
-            <a:endParaRPr lang="fr-FR"/>
+            <a:endParaRPr lang="fr-FR" dirty="0"/>
           </a:p>
         </p:txBody>
       </p:sp>
@@ -830,6 +831,210 @@
 </file>
 
 <file path=ppt/notesSlides/notesSlide3.xml><?xml version="1.0" encoding="utf-8"?>
+<p:notes xmlns:a="http://schemas.openxmlformats.org/drawingml/2006/main" xmlns:r="http://schemas.openxmlformats.org/officeDocument/2006/relationships" xmlns:p="http://schemas.openxmlformats.org/presentationml/2006/main">
+  <p:cSld>
+    <p:spTree>
+      <p:nvGrpSpPr>
+        <p:cNvPr id="1" name=""/>
+        <p:cNvGrpSpPr/>
+        <p:nvPr/>
+      </p:nvGrpSpPr>
+      <p:grpSpPr>
+        <a:xfrm>
+          <a:off x="0" y="0"/>
+          <a:ext cx="0" cy="0"/>
+          <a:chOff x="0" y="0"/>
+          <a:chExt cx="0" cy="0"/>
+        </a:xfrm>
+      </p:grpSpPr>
+      <p:sp>
+        <p:nvSpPr>
+          <p:cNvPr id="2" name="Espace réservé de l'image des diapositives 1"/>
+          <p:cNvSpPr>
+            <a:spLocks noGrp="1" noRot="1" noChangeAspect="1"/>
+          </p:cNvSpPr>
+          <p:nvPr>
+            <p:ph type="sldImg"/>
+          </p:nvPr>
+        </p:nvSpPr>
+        <p:spPr/>
+      </p:sp>
+      <p:sp>
+        <p:nvSpPr>
+          <p:cNvPr id="3" name="Espace réservé des notes 2"/>
+          <p:cNvSpPr>
+            <a:spLocks noGrp="1"/>
+          </p:cNvSpPr>
+          <p:nvPr>
+            <p:ph type="body" idx="1"/>
+          </p:nvPr>
+        </p:nvSpPr>
+        <p:spPr/>
+        <p:txBody>
+          <a:bodyPr/>
+          <a:lstStyle/>
+          <a:p>
+            <a:r>
+              <a:rPr lang="fr-FR" dirty="0" err="1"/>
+              <a:t>PlantUML</a:t>
+            </a:r>
+            <a:r>
+              <a:rPr lang="fr-FR" dirty="0"/>
+              <a:t> est un outil qui permet de générer des diagrammes à partir d'une syntaxe textuelle simple. Il est utilisé pour modéliser et documenter visuellement des architectures logicielles, des processus métiers et diverses interactions entre composants, ce qui facilite la communication technique et la compréhension des systèmes complexes.</a:t>
+            </a:r>
+          </a:p>
+        </p:txBody>
+      </p:sp>
+      <p:sp>
+        <p:nvSpPr>
+          <p:cNvPr id="4" name="Espace réservé du numéro de diapositive 3"/>
+          <p:cNvSpPr>
+            <a:spLocks noGrp="1"/>
+          </p:cNvSpPr>
+          <p:nvPr>
+            <p:ph type="sldNum" sz="quarter" idx="5"/>
+          </p:nvPr>
+        </p:nvSpPr>
+        <p:spPr/>
+        <p:txBody>
+          <a:bodyPr/>
+          <a:lstStyle/>
+          <a:p>
+            <a:pPr rtl="0"/>
+            <a:fld id="{4B725628-3A68-42F4-BA86-981817953149}" type="slidenum">
+              <a:rPr lang="fr-FR" noProof="0" smtClean="0"/>
+              <a:t>4</a:t>
+            </a:fld>
+            <a:endParaRPr lang="fr-FR" noProof="0"/>
+          </a:p>
+        </p:txBody>
+      </p:sp>
+    </p:spTree>
+    <p:extLst>
+      <p:ext uri="{BB962C8B-B14F-4D97-AF65-F5344CB8AC3E}">
+        <p14:creationId xmlns:p14="http://schemas.microsoft.com/office/powerpoint/2010/main" val="591090720"/>
+      </p:ext>
+    </p:extLst>
+  </p:cSld>
+  <p:clrMapOvr>
+    <a:masterClrMapping/>
+  </p:clrMapOvr>
+</p:notes>
+</file>
+
+<file path=ppt/notesSlides/notesSlide4.xml><?xml version="1.0" encoding="utf-8"?>
+<p:notes xmlns:a="http://schemas.openxmlformats.org/drawingml/2006/main" xmlns:r="http://schemas.openxmlformats.org/officeDocument/2006/relationships" xmlns:p="http://schemas.openxmlformats.org/presentationml/2006/main">
+  <p:cSld>
+    <p:spTree>
+      <p:nvGrpSpPr>
+        <p:cNvPr id="1" name=""/>
+        <p:cNvGrpSpPr/>
+        <p:nvPr/>
+      </p:nvGrpSpPr>
+      <p:grpSpPr>
+        <a:xfrm>
+          <a:off x="0" y="0"/>
+          <a:ext cx="0" cy="0"/>
+          <a:chOff x="0" y="0"/>
+          <a:chExt cx="0" cy="0"/>
+        </a:xfrm>
+      </p:grpSpPr>
+      <p:sp>
+        <p:nvSpPr>
+          <p:cNvPr id="2" name="Espace réservé de l'image des diapositives 1"/>
+          <p:cNvSpPr>
+            <a:spLocks noGrp="1" noRot="1" noChangeAspect="1"/>
+          </p:cNvSpPr>
+          <p:nvPr>
+            <p:ph type="sldImg"/>
+          </p:nvPr>
+        </p:nvSpPr>
+        <p:spPr/>
+      </p:sp>
+      <p:sp>
+        <p:nvSpPr>
+          <p:cNvPr id="3" name="Espace réservé des notes 2"/>
+          <p:cNvSpPr>
+            <a:spLocks noGrp="1"/>
+          </p:cNvSpPr>
+          <p:nvPr>
+            <p:ph type="body" idx="1"/>
+          </p:nvPr>
+        </p:nvSpPr>
+        <p:spPr/>
+        <p:txBody>
+          <a:bodyPr/>
+          <a:lstStyle/>
+          <a:p>
+            <a:r>
+              <a:rPr lang="fr-FR" dirty="0"/>
+              <a:t>L'UML (</a:t>
+            </a:r>
+            <a:r>
+              <a:rPr lang="fr-FR" dirty="0" err="1"/>
+              <a:t>Unified</a:t>
+            </a:r>
+            <a:r>
+              <a:rPr lang="fr-FR" dirty="0"/>
+              <a:t> Modeling </a:t>
+            </a:r>
+            <a:r>
+              <a:rPr lang="fr-FR" dirty="0" err="1"/>
+              <a:t>Language</a:t>
+            </a:r>
+            <a:r>
+              <a:rPr lang="fr-FR" dirty="0"/>
+              <a:t> ou </a:t>
+            </a:r>
+            <a:r>
+              <a:rPr lang="fr-FR" b="1" dirty="0"/>
+              <a:t>Langage de modélisation unifiée</a:t>
+            </a:r>
+            <a:r>
+              <a:rPr lang="fr-FR" dirty="0"/>
+              <a:t> en français) est un langage graphique de modélisation informatique. Ce langage est désormais la référence en modélisation objet, ou programmation orientée objet</a:t>
+            </a:r>
+          </a:p>
+        </p:txBody>
+      </p:sp>
+      <p:sp>
+        <p:nvSpPr>
+          <p:cNvPr id="4" name="Espace réservé du numéro de diapositive 3"/>
+          <p:cNvSpPr>
+            <a:spLocks noGrp="1"/>
+          </p:cNvSpPr>
+          <p:nvPr>
+            <p:ph type="sldNum" sz="quarter" idx="5"/>
+          </p:nvPr>
+        </p:nvSpPr>
+        <p:spPr/>
+        <p:txBody>
+          <a:bodyPr/>
+          <a:lstStyle/>
+          <a:p>
+            <a:pPr rtl="0"/>
+            <a:fld id="{4B725628-3A68-42F4-BA86-981817953149}" type="slidenum">
+              <a:rPr lang="fr-FR" noProof="0" smtClean="0"/>
+              <a:t>5</a:t>
+            </a:fld>
+            <a:endParaRPr lang="fr-FR" noProof="0"/>
+          </a:p>
+        </p:txBody>
+      </p:sp>
+    </p:spTree>
+    <p:extLst>
+      <p:ext uri="{BB962C8B-B14F-4D97-AF65-F5344CB8AC3E}">
+        <p14:creationId xmlns:p14="http://schemas.microsoft.com/office/powerpoint/2010/main" val="3647718428"/>
+      </p:ext>
+    </p:extLst>
+  </p:cSld>
+  <p:clrMapOvr>
+    <a:masterClrMapping/>
+  </p:clrMapOvr>
+</p:notes>
+</file>
+
+<file path=ppt/notesSlides/notesSlide5.xml><?xml version="1.0" encoding="utf-8"?>
 <p:notes xmlns:a="http://schemas.openxmlformats.org/drawingml/2006/main" xmlns:r="http://schemas.openxmlformats.org/officeDocument/2006/relationships" xmlns:p="http://schemas.openxmlformats.org/presentationml/2006/main">
   <p:cSld>
     <p:spTree>
@@ -988,7 +1193,7 @@
             <a:pPr rtl="0"/>
             <a:fld id="{4B725628-3A68-42F4-BA86-981817953149}" type="slidenum">
               <a:rPr lang="fr-FR" noProof="0" smtClean="0"/>
-              <a:t>5</a:t>
+              <a:t>6</a:t>
             </a:fld>
             <a:endParaRPr lang="fr-FR" noProof="0"/>
           </a:p>
@@ -1007,7 +1212,7 @@
 </p:notes>
 </file>
 
-<file path=ppt/notesSlides/notesSlide4.xml><?xml version="1.0" encoding="utf-8"?>
+<file path=ppt/notesSlides/notesSlide6.xml><?xml version="1.0" encoding="utf-8"?>
 <p:notes xmlns:a="http://schemas.openxmlformats.org/drawingml/2006/main" xmlns:r="http://schemas.openxmlformats.org/officeDocument/2006/relationships" xmlns:p="http://schemas.openxmlformats.org/presentationml/2006/main">
   <p:cSld>
     <p:spTree>
@@ -1068,6 +1273,52 @@
               <a:t>, capable de transformer des adresses ou descriptions textuelles en coordonnées géographiques et, inversement, de fournir des adresses à partir de points sur une carte. Son caractère libre et sa richesse de données mises à jour en continu en font une alternative solide aux solutions propriétaires, généralement privilégiée pour les projets nécessitant une intégration flexible et personnalisable.</a:t>
             </a:r>
           </a:p>
+          <a:p>
+            <a:pPr marL="0" marR="0" lvl="0" indent="0" algn="l" defTabSz="914400" rtl="0" eaLnBrk="1" fontAlgn="auto" latinLnBrk="0" hangingPunct="1">
+              <a:lnSpc>
+                <a:spcPct val="100000"/>
+              </a:lnSpc>
+              <a:spcBef>
+                <a:spcPts val="0"/>
+              </a:spcBef>
+              <a:spcAft>
+                <a:spcPts val="0"/>
+              </a:spcAft>
+              <a:buClrTx/>
+              <a:buSzTx/>
+              <a:buFontTx/>
+              <a:buNone/>
+              <a:tabLst/>
+              <a:defRPr/>
+            </a:pPr>
+            <a:r>
+              <a:rPr lang="fr-FR" dirty="0" err="1"/>
+              <a:t>Nominatim</a:t>
+            </a:r>
+            <a:r>
+              <a:rPr lang="fr-FR" dirty="0"/>
+              <a:t> (du latin, 'par nom') est un outil pour la recherche de données OSM par nom et </a:t>
+            </a:r>
+            <a:r>
+              <a:rPr lang="fr-FR" dirty="0" err="1"/>
+              <a:t>et</a:t>
+            </a:r>
+            <a:r>
+              <a:rPr lang="fr-FR" dirty="0"/>
+              <a:t> générer des adresses synthétiques de points OSM (</a:t>
+            </a:r>
+            <a:r>
+              <a:rPr lang="fr-FR" dirty="0" err="1"/>
+              <a:t>géodification</a:t>
+            </a:r>
+            <a:r>
+              <a:rPr lang="fr-FR" dirty="0"/>
+              <a:t> inverse). Il a également une capacité limitée à rechercher des fonctionnalités par leur type. (pubs, hôtels, églises, etc.).</a:t>
+            </a:r>
+          </a:p>
+          <a:p>
+            <a:endParaRPr lang="fr-FR" dirty="0"/>
+          </a:p>
         </p:txBody>
       </p:sp>
       <p:sp>
@@ -1088,7 +1339,7 @@
             <a:pPr rtl="0"/>
             <a:fld id="{4B725628-3A68-42F4-BA86-981817953149}" type="slidenum">
               <a:rPr lang="fr-FR" noProof="0" smtClean="0"/>
-              <a:t>8</a:t>
+              <a:t>9</a:t>
             </a:fld>
             <a:endParaRPr lang="fr-FR" noProof="0"/>
           </a:p>
@@ -9901,7 +10152,7 @@
             <a:pPr rtl="0"/>
             <a:fld id="{E27949C9-1C26-45BB-BA53-FCDDA512553D}" type="datetime1">
               <a:rPr lang="fr-FR" noProof="0" smtClean="0"/>
-              <a:t>03/03/2025</a:t>
+              <a:t>04/03/2025</a:t>
             </a:fld>
             <a:endParaRPr lang="fr-FR" noProof="0"/>
           </a:p>
@@ -10105,7 +10356,7 @@
             <a:pPr rtl="0"/>
             <a:fld id="{721F1C99-0FCE-4E24-B45E-A6B8B87EE97A}" type="datetime1">
               <a:rPr lang="fr-FR" noProof="0" smtClean="0"/>
-              <a:t>03/03/2025</a:t>
+              <a:t>04/03/2025</a:t>
             </a:fld>
             <a:endParaRPr lang="fr-FR" noProof="0"/>
           </a:p>
@@ -10282,7 +10533,7 @@
             <a:pPr rtl="0"/>
             <a:fld id="{132C3B24-D805-4A76-8E65-C9738296B930}" type="datetime1">
               <a:rPr lang="fr-FR" noProof="0" smtClean="0"/>
-              <a:t>03/03/2025</a:t>
+              <a:t>04/03/2025</a:t>
             </a:fld>
             <a:endParaRPr lang="fr-FR" noProof="0"/>
           </a:p>
@@ -10484,7 +10735,7 @@
             <a:pPr rtl="0"/>
             <a:fld id="{2B70CDC4-B118-436F-8999-4E53124174C8}" type="datetime1">
               <a:rPr lang="fr-FR" noProof="0" smtClean="0"/>
-              <a:t>03/03/2025</a:t>
+              <a:t>04/03/2025</a:t>
             </a:fld>
             <a:endParaRPr lang="fr-FR" noProof="0"/>
           </a:p>
@@ -19380,7 +19631,7 @@
             <a:pPr rtl="0"/>
             <a:fld id="{0CB3B74C-3552-4EC5-970E-EA08B17DE6C3}" type="datetime1">
               <a:rPr lang="fr-FR" noProof="0" smtClean="0"/>
-              <a:t>03/03/2025</a:t>
+              <a:t>04/03/2025</a:t>
             </a:fld>
             <a:endParaRPr lang="fr-FR" noProof="0"/>
           </a:p>
@@ -19650,7 +19901,7 @@
             <a:pPr rtl="0"/>
             <a:fld id="{BA86671B-8518-416E-9A93-110C3FC765B0}" type="datetime1">
               <a:rPr lang="fr-FR" noProof="0" smtClean="0"/>
-              <a:t>03/03/2025</a:t>
+              <a:t>04/03/2025</a:t>
             </a:fld>
             <a:endParaRPr lang="fr-FR" noProof="0"/>
           </a:p>
@@ -20036,7 +20287,7 @@
             <a:pPr rtl="0"/>
             <a:fld id="{B95CA171-7817-4EB8-BD06-8DC08B6DD669}" type="datetime1">
               <a:rPr lang="fr-FR" noProof="0" smtClean="0"/>
-              <a:t>03/03/2025</a:t>
+              <a:t>04/03/2025</a:t>
             </a:fld>
             <a:endParaRPr lang="fr-FR" noProof="0"/>
           </a:p>
@@ -20152,7 +20403,7 @@
             <a:pPr rtl="0"/>
             <a:fld id="{A8CB6A67-71AB-4430-8E9A-3C4E54AB6270}" type="datetime1">
               <a:rPr lang="fr-FR" noProof="0" smtClean="0"/>
-              <a:t>03/03/2025</a:t>
+              <a:t>04/03/2025</a:t>
             </a:fld>
             <a:endParaRPr lang="fr-FR" noProof="0"/>
           </a:p>
@@ -20245,7 +20496,7 @@
             <a:pPr rtl="0"/>
             <a:fld id="{3278E809-7279-41D4-8D12-46601669AEF8}" type="datetime1">
               <a:rPr lang="fr-FR" noProof="0" smtClean="0"/>
-              <a:t>03/03/2025</a:t>
+              <a:t>04/03/2025</a:t>
             </a:fld>
             <a:endParaRPr lang="fr-FR" noProof="0"/>
           </a:p>
@@ -20532,7 +20783,7 @@
             <a:pPr rtl="0"/>
             <a:fld id="{7EE15B8F-B91C-47AC-B98D-C114892A6229}" type="datetime1">
               <a:rPr lang="fr-FR" noProof="0" smtClean="0"/>
-              <a:t>03/03/2025</a:t>
+              <a:t>04/03/2025</a:t>
             </a:fld>
             <a:endParaRPr lang="fr-FR" noProof="0"/>
           </a:p>
@@ -20810,7 +21061,7 @@
             <a:pPr rtl="0"/>
             <a:fld id="{92769C86-3347-4673-9EED-DCA59A1E5DED}" type="datetime1">
               <a:rPr lang="fr-FR" noProof="0" smtClean="0"/>
-              <a:t>03/03/2025</a:t>
+              <a:t>04/03/2025</a:t>
             </a:fld>
             <a:endParaRPr lang="fr-FR" noProof="0"/>
           </a:p>
@@ -21057,7 +21308,7 @@
             <a:pPr rtl="0"/>
             <a:fld id="{87726DE0-7F70-4976-999D-381380B45882}" type="datetime1">
               <a:rPr lang="fr-FR" noProof="0" smtClean="0"/>
-              <a:t>03/03/2025</a:t>
+              <a:t>04/03/2025</a:t>
             </a:fld>
             <a:endParaRPr lang="fr-FR" noProof="0"/>
           </a:p>
@@ -21889,6 +22140,112 @@
           <p:cNvPr id="2" name="Titre 1">
             <a:extLst>
               <a:ext uri="{FF2B5EF4-FFF2-40B4-BE49-F238E27FC236}">
+                <a16:creationId xmlns:a16="http://schemas.microsoft.com/office/drawing/2014/main" id="{BC236685-32D6-B0BE-646C-8155BD3F3270}"/>
+              </a:ext>
+            </a:extLst>
+          </p:cNvPr>
+          <p:cNvSpPr>
+            <a:spLocks noGrp="1"/>
+          </p:cNvSpPr>
+          <p:nvPr>
+            <p:ph type="title"/>
+          </p:nvPr>
+        </p:nvSpPr>
+        <p:spPr/>
+        <p:txBody>
+          <a:bodyPr/>
+          <a:lstStyle/>
+          <a:p>
+            <a:r>
+              <a:rPr lang="fr-FR" dirty="0"/>
+              <a:t>PostgreSQL pour le Stockage :</a:t>
+            </a:r>
+          </a:p>
+        </p:txBody>
+      </p:sp>
+      <p:sp>
+        <p:nvSpPr>
+          <p:cNvPr id="3" name="Espace réservé du contenu 2">
+            <a:extLst>
+              <a:ext uri="{FF2B5EF4-FFF2-40B4-BE49-F238E27FC236}">
+                <a16:creationId xmlns:a16="http://schemas.microsoft.com/office/drawing/2014/main" id="{8A424E0B-6E23-2085-E51F-378C86749F8D}"/>
+              </a:ext>
+            </a:extLst>
+          </p:cNvPr>
+          <p:cNvSpPr>
+            <a:spLocks noGrp="1"/>
+          </p:cNvSpPr>
+          <p:nvPr>
+            <p:ph idx="1"/>
+          </p:nvPr>
+        </p:nvSpPr>
+        <p:spPr>
+          <a:xfrm>
+            <a:off x="1024128" y="2657474"/>
+            <a:ext cx="9720073" cy="3651885"/>
+          </a:xfrm>
+        </p:spPr>
+        <p:txBody>
+          <a:bodyPr/>
+          <a:lstStyle/>
+          <a:p>
+            <a:r>
+              <a:rPr lang="fr-FR" dirty="0"/>
+              <a:t>Stockage des données sur PostgreSQL (Azure) :</a:t>
+            </a:r>
+          </a:p>
+          <a:p>
+            <a:r>
+              <a:rPr lang="fr-FR" dirty="0"/>
+              <a:t>- Requêtes météo</a:t>
+            </a:r>
+          </a:p>
+          <a:p>
+            <a:r>
+              <a:rPr lang="fr-FR" dirty="0"/>
+              <a:t>- Feedbacks utilisateur</a:t>
+            </a:r>
+          </a:p>
+          <a:p>
+            <a:endParaRPr lang="fr-FR" dirty="0"/>
+          </a:p>
+        </p:txBody>
+      </p:sp>
+    </p:spTree>
+    <p:extLst>
+      <p:ext uri="{BB962C8B-B14F-4D97-AF65-F5344CB8AC3E}">
+        <p14:creationId xmlns:p14="http://schemas.microsoft.com/office/powerpoint/2010/main" val="1416496782"/>
+      </p:ext>
+    </p:extLst>
+  </p:cSld>
+  <p:clrMapOvr>
+    <a:masterClrMapping/>
+  </p:clrMapOvr>
+</p:sld>
+</file>
+
+<file path=ppt/slides/slide11.xml><?xml version="1.0" encoding="utf-8"?>
+<p:sld xmlns:a="http://schemas.openxmlformats.org/drawingml/2006/main" xmlns:r="http://schemas.openxmlformats.org/officeDocument/2006/relationships" xmlns:p="http://schemas.openxmlformats.org/presentationml/2006/main">
+  <p:cSld>
+    <p:spTree>
+      <p:nvGrpSpPr>
+        <p:cNvPr id="1" name=""/>
+        <p:cNvGrpSpPr/>
+        <p:nvPr/>
+      </p:nvGrpSpPr>
+      <p:grpSpPr>
+        <a:xfrm>
+          <a:off x="0" y="0"/>
+          <a:ext cx="0" cy="0"/>
+          <a:chOff x="0" y="0"/>
+          <a:chExt cx="0" cy="0"/>
+        </a:xfrm>
+      </p:grpSpPr>
+      <p:sp>
+        <p:nvSpPr>
+          <p:cNvPr id="2" name="Titre 1">
+            <a:extLst>
+              <a:ext uri="{FF2B5EF4-FFF2-40B4-BE49-F238E27FC236}">
                 <a16:creationId xmlns:a16="http://schemas.microsoft.com/office/drawing/2014/main" id="{B66DF887-205E-0B01-68A1-4624875110AE}"/>
               </a:ext>
             </a:extLst>
@@ -22015,7 +22372,7 @@
 </p:sld>
 </file>
 
-<file path=ppt/slides/slide11.xml><?xml version="1.0" encoding="utf-8"?>
+<file path=ppt/slides/slide12.xml><?xml version="1.0" encoding="utf-8"?>
 <p:sld xmlns:a="http://schemas.openxmlformats.org/drawingml/2006/main" xmlns:r="http://schemas.openxmlformats.org/officeDocument/2006/relationships" xmlns:p="http://schemas.openxmlformats.org/presentationml/2006/main">
   <p:cSld>
     <p:spTree>
@@ -22112,7 +22469,7 @@
 </p:sld>
 </file>
 
-<file path=ppt/slides/slide12.xml><?xml version="1.0" encoding="utf-8"?>
+<file path=ppt/slides/slide13.xml><?xml version="1.0" encoding="utf-8"?>
 <p:sld xmlns:a="http://schemas.openxmlformats.org/drawingml/2006/main" xmlns:r="http://schemas.openxmlformats.org/officeDocument/2006/relationships" xmlns:p="http://schemas.openxmlformats.org/presentationml/2006/main">
   <p:cSld>
     <p:spTree>
@@ -22521,7 +22878,7 @@
           <p:nvPr/>
         </p:nvPicPr>
         <p:blipFill>
-          <a:blip r:embed="rId2"/>
+          <a:blip r:embed="rId3"/>
           <a:stretch>
             <a:fillRect/>
           </a:stretch>
@@ -22551,6 +22908,229 @@
 </file>
 
 <file path=ppt/slides/slide5.xml><?xml version="1.0" encoding="utf-8"?>
+<p:sld xmlns:a="http://schemas.openxmlformats.org/drawingml/2006/main" xmlns:r="http://schemas.openxmlformats.org/officeDocument/2006/relationships" xmlns:p="http://schemas.openxmlformats.org/presentationml/2006/main">
+  <p:cSld>
+    <p:spTree>
+      <p:nvGrpSpPr>
+        <p:cNvPr id="1" name=""/>
+        <p:cNvGrpSpPr/>
+        <p:nvPr/>
+      </p:nvGrpSpPr>
+      <p:grpSpPr>
+        <a:xfrm>
+          <a:off x="0" y="0"/>
+          <a:ext cx="0" cy="0"/>
+          <a:chOff x="0" y="0"/>
+          <a:chExt cx="0" cy="0"/>
+        </a:xfrm>
+      </p:grpSpPr>
+      <p:sp>
+        <p:nvSpPr>
+          <p:cNvPr id="3" name="Espace réservé du contenu 2">
+            <a:extLst>
+              <a:ext uri="{FF2B5EF4-FFF2-40B4-BE49-F238E27FC236}">
+                <a16:creationId xmlns:a16="http://schemas.microsoft.com/office/drawing/2014/main" id="{67CBD6EB-EEE9-917F-5465-BB05590CB214}"/>
+              </a:ext>
+            </a:extLst>
+          </p:cNvPr>
+          <p:cNvSpPr>
+            <a:spLocks noGrp="1"/>
+          </p:cNvSpPr>
+          <p:nvPr>
+            <p:ph idx="1"/>
+          </p:nvPr>
+        </p:nvSpPr>
+        <p:spPr>
+          <a:xfrm>
+            <a:off x="1024128" y="1918252"/>
+            <a:ext cx="9720073" cy="4599830"/>
+          </a:xfrm>
+        </p:spPr>
+        <p:txBody>
+          <a:bodyPr>
+            <a:normAutofit fontScale="92500" lnSpcReduction="10000"/>
+          </a:bodyPr>
+          <a:lstStyle/>
+          <a:p>
+            <a:r>
+              <a:rPr lang="fr-FR" dirty="0" err="1"/>
+              <a:t>PlantUML</a:t>
+            </a:r>
+            <a:r>
+              <a:rPr lang="fr-FR" dirty="0"/>
+              <a:t> est un outil open source conçu pour générer des diagrammes de modélisation à partir d'un langage de description textuel simple et expressif :</a:t>
+            </a:r>
+          </a:p>
+          <a:p>
+            <a:pPr>
+              <a:buFont typeface="Arial" panose="020B0604020202020204" pitchFamily="34" charset="0"/>
+              <a:buChar char="•"/>
+            </a:pPr>
+            <a:r>
+              <a:rPr lang="fr-FR" dirty="0">
+                <a:hlinkClick r:id="rId3"/>
+              </a:rPr>
+              <a:t>Diagramme de séquence</a:t>
+            </a:r>
+            <a:endParaRPr lang="fr-FR" dirty="0"/>
+          </a:p>
+          <a:p>
+            <a:pPr>
+              <a:buFont typeface="Arial" panose="020B0604020202020204" pitchFamily="34" charset="0"/>
+              <a:buChar char="•"/>
+            </a:pPr>
+            <a:r>
+              <a:rPr lang="fr-FR" dirty="0">
+                <a:hlinkClick r:id="rId4"/>
+              </a:rPr>
+              <a:t>Diagramme de cas d'utilisation</a:t>
+            </a:r>
+            <a:endParaRPr lang="fr-FR" dirty="0"/>
+          </a:p>
+          <a:p>
+            <a:pPr>
+              <a:buFont typeface="Arial" panose="020B0604020202020204" pitchFamily="34" charset="0"/>
+              <a:buChar char="•"/>
+            </a:pPr>
+            <a:r>
+              <a:rPr lang="fr-FR" dirty="0">
+                <a:hlinkClick r:id="rId5"/>
+              </a:rPr>
+              <a:t>Diagramme de classe</a:t>
+            </a:r>
+            <a:endParaRPr lang="fr-FR" dirty="0"/>
+          </a:p>
+          <a:p>
+            <a:pPr>
+              <a:buFont typeface="Arial" panose="020B0604020202020204" pitchFamily="34" charset="0"/>
+              <a:buChar char="•"/>
+            </a:pPr>
+            <a:r>
+              <a:rPr lang="fr-FR" dirty="0">
+                <a:hlinkClick r:id="rId6"/>
+              </a:rPr>
+              <a:t>Diagramme d'objets</a:t>
+            </a:r>
+            <a:endParaRPr lang="fr-FR" dirty="0"/>
+          </a:p>
+          <a:p>
+            <a:pPr>
+              <a:buFont typeface="Arial" panose="020B0604020202020204" pitchFamily="34" charset="0"/>
+              <a:buChar char="•"/>
+            </a:pPr>
+            <a:r>
+              <a:rPr lang="fr-FR" dirty="0">
+                <a:hlinkClick r:id="rId7"/>
+              </a:rPr>
+              <a:t>Diagramme d'activité</a:t>
+            </a:r>
+            <a:r>
+              <a:rPr lang="fr-FR" dirty="0"/>
+              <a:t> </a:t>
+            </a:r>
+            <a:endParaRPr lang="fr-FR" i="1" dirty="0"/>
+          </a:p>
+          <a:p>
+            <a:pPr>
+              <a:buFont typeface="Arial" panose="020B0604020202020204" pitchFamily="34" charset="0"/>
+              <a:buChar char="•"/>
+            </a:pPr>
+            <a:r>
+              <a:rPr lang="fr-FR" dirty="0">
+                <a:hlinkClick r:id="rId8"/>
+              </a:rPr>
+              <a:t>Diagramme de composants</a:t>
+            </a:r>
+            <a:endParaRPr lang="fr-FR" dirty="0"/>
+          </a:p>
+          <a:p>
+            <a:pPr>
+              <a:buFont typeface="Arial" panose="020B0604020202020204" pitchFamily="34" charset="0"/>
+              <a:buChar char="•"/>
+            </a:pPr>
+            <a:r>
+              <a:rPr lang="fr-FR" dirty="0">
+                <a:hlinkClick r:id="rId9"/>
+              </a:rPr>
+              <a:t>Diagramme de déploiement</a:t>
+            </a:r>
+            <a:endParaRPr lang="fr-FR" dirty="0"/>
+          </a:p>
+          <a:p>
+            <a:pPr>
+              <a:buFont typeface="Arial" panose="020B0604020202020204" pitchFamily="34" charset="0"/>
+              <a:buChar char="•"/>
+            </a:pPr>
+            <a:r>
+              <a:rPr lang="fr-FR" dirty="0">
+                <a:hlinkClick r:id="rId10"/>
+              </a:rPr>
+              <a:t>Diagramme d'état</a:t>
+            </a:r>
+            <a:endParaRPr lang="fr-FR" dirty="0"/>
+          </a:p>
+          <a:p>
+            <a:pPr>
+              <a:buFont typeface="Arial" panose="020B0604020202020204" pitchFamily="34" charset="0"/>
+              <a:buChar char="•"/>
+            </a:pPr>
+            <a:r>
+              <a:rPr lang="fr-FR" dirty="0">
+                <a:hlinkClick r:id="rId11"/>
+              </a:rPr>
+              <a:t>Diagramme de temps</a:t>
+            </a:r>
+            <a:endParaRPr lang="fr-FR" dirty="0"/>
+          </a:p>
+          <a:p>
+            <a:endParaRPr lang="fr-FR" dirty="0"/>
+          </a:p>
+        </p:txBody>
+      </p:sp>
+      <p:pic>
+        <p:nvPicPr>
+          <p:cNvPr id="5" name="Image 4">
+            <a:extLst>
+              <a:ext uri="{FF2B5EF4-FFF2-40B4-BE49-F238E27FC236}">
+                <a16:creationId xmlns:a16="http://schemas.microsoft.com/office/drawing/2014/main" id="{73F5E3A2-4413-9D1C-849A-1B7C4E485E31}"/>
+              </a:ext>
+            </a:extLst>
+          </p:cNvPr>
+          <p:cNvPicPr>
+            <a:picLocks noChangeAspect="1"/>
+          </p:cNvPicPr>
+          <p:nvPr/>
+        </p:nvPicPr>
+        <p:blipFill>
+          <a:blip r:embed="rId12"/>
+          <a:stretch>
+            <a:fillRect/>
+          </a:stretch>
+        </p:blipFill>
+        <p:spPr>
+          <a:xfrm>
+            <a:off x="1024128" y="723218"/>
+            <a:ext cx="9447962" cy="896860"/>
+          </a:xfrm>
+          <a:prstGeom prst="rect">
+            <a:avLst/>
+          </a:prstGeom>
+        </p:spPr>
+      </p:pic>
+    </p:spTree>
+    <p:extLst>
+      <p:ext uri="{BB962C8B-B14F-4D97-AF65-F5344CB8AC3E}">
+        <p14:creationId xmlns:p14="http://schemas.microsoft.com/office/powerpoint/2010/main" val="1820508389"/>
+      </p:ext>
+    </p:extLst>
+  </p:cSld>
+  <p:clrMapOvr>
+    <a:masterClrMapping/>
+  </p:clrMapOvr>
+</p:sld>
+</file>
+
+<file path=ppt/slides/slide6.xml><?xml version="1.0" encoding="utf-8"?>
 <p:sld xmlns:a="http://schemas.openxmlformats.org/drawingml/2006/main" xmlns:r="http://schemas.openxmlformats.org/officeDocument/2006/relationships" xmlns:p="http://schemas.openxmlformats.org/presentationml/2006/main">
   <p:cSld>
     <p:spTree>
@@ -22730,7 +23310,7 @@
 </p:sld>
 </file>
 
-<file path=ppt/slides/slide6.xml><?xml version="1.0" encoding="utf-8"?>
+<file path=ppt/slides/slide7.xml><?xml version="1.0" encoding="utf-8"?>
 <p:sld xmlns:a="http://schemas.openxmlformats.org/drawingml/2006/main" xmlns:r="http://schemas.openxmlformats.org/officeDocument/2006/relationships" xmlns:p="http://schemas.openxmlformats.org/presentationml/2006/main">
   <p:cSld>
     <p:spTree>
@@ -22871,7 +23451,7 @@
 </p:sld>
 </file>
 
-<file path=ppt/slides/slide7.xml><?xml version="1.0" encoding="utf-8"?>
+<file path=ppt/slides/slide8.xml><?xml version="1.0" encoding="utf-8"?>
 <p:sld xmlns:a="http://schemas.openxmlformats.org/drawingml/2006/main" xmlns:r="http://schemas.openxmlformats.org/officeDocument/2006/relationships" xmlns:p="http://schemas.openxmlformats.org/presentationml/2006/main">
   <p:cSld>
     <p:spTree>
@@ -23000,7 +23580,7 @@
 </p:sld>
 </file>
 
-<file path=ppt/slides/slide8.xml><?xml version="1.0" encoding="utf-8"?>
+<file path=ppt/slides/slide9.xml><?xml version="1.0" encoding="utf-8"?>
 <p:sld xmlns:a="http://schemas.openxmlformats.org/drawingml/2006/main" xmlns:r="http://schemas.openxmlformats.org/officeDocument/2006/relationships" xmlns:p="http://schemas.openxmlformats.org/presentationml/2006/main">
   <p:cSld>
     <p:spTree>
@@ -23113,7 +23693,35 @@
               <a:rPr lang="fr-FR" sz="2400" dirty="0"/>
               <a:t>.</a:t>
             </a:r>
-            <a:endParaRPr lang="fr-FR" dirty="0"/>
+          </a:p>
+          <a:p>
+            <a:endParaRPr lang="fr-FR" sz="2400" dirty="0"/>
+          </a:p>
+          <a:p>
+            <a:r>
+              <a:rPr lang="fr-FR" dirty="0" err="1"/>
+              <a:t>Nominatim</a:t>
+            </a:r>
+            <a:r>
+              <a:rPr lang="fr-FR" dirty="0"/>
+              <a:t> (du latin, 'par nom') est un outil pour la recherche de données OSM par nom et </a:t>
+            </a:r>
+            <a:r>
+              <a:rPr lang="fr-FR" dirty="0" err="1"/>
+              <a:t>et</a:t>
+            </a:r>
+            <a:r>
+              <a:rPr lang="fr-FR" dirty="0"/>
+              <a:t> générer des adresses synthétiques de points OSM (</a:t>
+            </a:r>
+            <a:r>
+              <a:rPr lang="fr-FR" dirty="0" err="1"/>
+              <a:t>géodification</a:t>
+            </a:r>
+            <a:r>
+              <a:rPr lang="fr-FR" dirty="0"/>
+              <a:t> inverse). Il a également une capacité limitée à rechercher des fonctionnalités par leur type. (pubs, hôtels, églises, etc.).</a:t>
+            </a:r>
           </a:p>
         </p:txBody>
       </p:sp>
@@ -23121,112 +23729,6 @@
     <p:extLst>
       <p:ext uri="{BB962C8B-B14F-4D97-AF65-F5344CB8AC3E}">
         <p14:creationId xmlns:p14="http://schemas.microsoft.com/office/powerpoint/2010/main" val="3544305459"/>
-      </p:ext>
-    </p:extLst>
-  </p:cSld>
-  <p:clrMapOvr>
-    <a:masterClrMapping/>
-  </p:clrMapOvr>
-</p:sld>
-</file>
-
-<file path=ppt/slides/slide9.xml><?xml version="1.0" encoding="utf-8"?>
-<p:sld xmlns:a="http://schemas.openxmlformats.org/drawingml/2006/main" xmlns:r="http://schemas.openxmlformats.org/officeDocument/2006/relationships" xmlns:p="http://schemas.openxmlformats.org/presentationml/2006/main">
-  <p:cSld>
-    <p:spTree>
-      <p:nvGrpSpPr>
-        <p:cNvPr id="1" name=""/>
-        <p:cNvGrpSpPr/>
-        <p:nvPr/>
-      </p:nvGrpSpPr>
-      <p:grpSpPr>
-        <a:xfrm>
-          <a:off x="0" y="0"/>
-          <a:ext cx="0" cy="0"/>
-          <a:chOff x="0" y="0"/>
-          <a:chExt cx="0" cy="0"/>
-        </a:xfrm>
-      </p:grpSpPr>
-      <p:sp>
-        <p:nvSpPr>
-          <p:cNvPr id="2" name="Titre 1">
-            <a:extLst>
-              <a:ext uri="{FF2B5EF4-FFF2-40B4-BE49-F238E27FC236}">
-                <a16:creationId xmlns:a16="http://schemas.microsoft.com/office/drawing/2014/main" id="{BC236685-32D6-B0BE-646C-8155BD3F3270}"/>
-              </a:ext>
-            </a:extLst>
-          </p:cNvPr>
-          <p:cNvSpPr>
-            <a:spLocks noGrp="1"/>
-          </p:cNvSpPr>
-          <p:nvPr>
-            <p:ph type="title"/>
-          </p:nvPr>
-        </p:nvSpPr>
-        <p:spPr/>
-        <p:txBody>
-          <a:bodyPr/>
-          <a:lstStyle/>
-          <a:p>
-            <a:r>
-              <a:rPr lang="fr-FR" dirty="0"/>
-              <a:t>PostgreSQL pour le Stockage :</a:t>
-            </a:r>
-          </a:p>
-        </p:txBody>
-      </p:sp>
-      <p:sp>
-        <p:nvSpPr>
-          <p:cNvPr id="3" name="Espace réservé du contenu 2">
-            <a:extLst>
-              <a:ext uri="{FF2B5EF4-FFF2-40B4-BE49-F238E27FC236}">
-                <a16:creationId xmlns:a16="http://schemas.microsoft.com/office/drawing/2014/main" id="{8A424E0B-6E23-2085-E51F-378C86749F8D}"/>
-              </a:ext>
-            </a:extLst>
-          </p:cNvPr>
-          <p:cNvSpPr>
-            <a:spLocks noGrp="1"/>
-          </p:cNvSpPr>
-          <p:nvPr>
-            <p:ph idx="1"/>
-          </p:nvPr>
-        </p:nvSpPr>
-        <p:spPr>
-          <a:xfrm>
-            <a:off x="1024128" y="2657474"/>
-            <a:ext cx="9720073" cy="3651885"/>
-          </a:xfrm>
-        </p:spPr>
-        <p:txBody>
-          <a:bodyPr/>
-          <a:lstStyle/>
-          <a:p>
-            <a:r>
-              <a:rPr lang="fr-FR" dirty="0"/>
-              <a:t>Stockage des données sur PostgreSQL (Azure) :</a:t>
-            </a:r>
-          </a:p>
-          <a:p>
-            <a:r>
-              <a:rPr lang="fr-FR" dirty="0"/>
-              <a:t>- Requêtes météo</a:t>
-            </a:r>
-          </a:p>
-          <a:p>
-            <a:r>
-              <a:rPr lang="fr-FR" dirty="0"/>
-              <a:t>- Feedbacks utilisateur</a:t>
-            </a:r>
-          </a:p>
-          <a:p>
-            <a:endParaRPr lang="fr-FR" dirty="0"/>
-          </a:p>
-        </p:txBody>
-      </p:sp>
-    </p:spTree>
-    <p:extLst>
-      <p:ext uri="{BB962C8B-B14F-4D97-AF65-F5344CB8AC3E}">
-        <p14:creationId xmlns:p14="http://schemas.microsoft.com/office/powerpoint/2010/main" val="1416496782"/>
       </p:ext>
     </p:extLst>
   </p:cSld>
@@ -24061,6 +24563,14 @@
 </file>
 
 <file path=customXml/item1.xml><?xml version="1.0" encoding="utf-8"?>
+<p:properties xmlns:p="http://schemas.microsoft.com/office/2006/metadata/properties" xmlns:xsi="http://www.w3.org/2001/XMLSchema-instance" xmlns:pc="http://schemas.microsoft.com/office/infopath/2007/PartnerControls">
+  <documentManagement>
+    <MediaServiceKeyPoints xmlns="71af3243-3dd4-4a8d-8c0d-dd76da1f02a5" xsi:nil="true"/>
+  </documentManagement>
+</p:properties>
+</file>
+
+<file path=customXml/item2.xml><?xml version="1.0" encoding="utf-8"?>
 <ct:contentTypeSchema xmlns:ct="http://schemas.microsoft.com/office/2006/metadata/contentType" xmlns:ma="http://schemas.microsoft.com/office/2006/metadata/properties/metaAttributes" ct:_="" ma:_="" ma:contentTypeName="Document" ma:contentTypeID="0x01010079F111ED35F8CC479449609E8A0923A6" ma:contentTypeVersion="11" ma:contentTypeDescription="Create a new document." ma:contentTypeScope="" ma:versionID="9677210f24a1be23c92c90fd886aa0aa">
   <xsd:schema xmlns:xsd="http://www.w3.org/2001/XMLSchema" xmlns:xs="http://www.w3.org/2001/XMLSchema" xmlns:p="http://schemas.microsoft.com/office/2006/metadata/properties" xmlns:ns2="71af3243-3dd4-4a8d-8c0d-dd76da1f02a5" xmlns:ns3="16c05727-aa75-4e4a-9b5f-8a80a1165891" targetNamespace="http://schemas.microsoft.com/office/2006/metadata/properties" ma:root="true" ma:fieldsID="60e05723c5c1908df1a1a4ebf11d344e" ns2:_="" ns3:_="">
     <xsd:import namespace="71af3243-3dd4-4a8d-8c0d-dd76da1f02a5"/>
@@ -24271,14 +24781,6 @@
 </ct:contentTypeSchema>
 </file>
 
-<file path=customXml/item2.xml><?xml version="1.0" encoding="utf-8"?>
-<p:properties xmlns:p="http://schemas.microsoft.com/office/2006/metadata/properties" xmlns:xsi="http://www.w3.org/2001/XMLSchema-instance" xmlns:pc="http://schemas.microsoft.com/office/infopath/2007/PartnerControls">
-  <documentManagement>
-    <MediaServiceKeyPoints xmlns="71af3243-3dd4-4a8d-8c0d-dd76da1f02a5" xsi:nil="true"/>
-  </documentManagement>
-</p:properties>
-</file>
-
 <file path=customXml/item3.xml><?xml version="1.0" encoding="utf-8"?>
 <?mso-contentType ?>
 <FormTemplates xmlns="http://schemas.microsoft.com/sharepoint/v3/contenttype/forms">
@@ -24289,6 +24791,16 @@
 </file>
 
 <file path=customXml/itemProps1.xml><?xml version="1.0" encoding="utf-8"?>
+<ds:datastoreItem xmlns:ds="http://schemas.openxmlformats.org/officeDocument/2006/customXml" ds:itemID="{788A2F88-55C5-4ED1-9541-807C65424763}">
+  <ds:schemaRefs>
+    <ds:schemaRef ds:uri="http://schemas.microsoft.com/office/2006/metadata/properties"/>
+    <ds:schemaRef ds:uri="http://schemas.microsoft.com/office/infopath/2007/PartnerControls"/>
+    <ds:schemaRef ds:uri="71af3243-3dd4-4a8d-8c0d-dd76da1f02a5"/>
+  </ds:schemaRefs>
+</ds:datastoreItem>
+</file>
+
+<file path=customXml/itemProps2.xml><?xml version="1.0" encoding="utf-8"?>
 <ds:datastoreItem xmlns:ds="http://schemas.openxmlformats.org/officeDocument/2006/customXml" ds:itemID="{B61EAB5F-88FC-4FAE-AE3C-037A3C365EB8}">
   <ds:schemaRefs>
     <ds:schemaRef ds:uri="http://schemas.microsoft.com/office/2006/metadata/contentType"/>
@@ -24307,16 +24819,6 @@
 </ds:datastoreItem>
 </file>
 
-<file path=customXml/itemProps2.xml><?xml version="1.0" encoding="utf-8"?>
-<ds:datastoreItem xmlns:ds="http://schemas.openxmlformats.org/officeDocument/2006/customXml" ds:itemID="{788A2F88-55C5-4ED1-9541-807C65424763}">
-  <ds:schemaRefs>
-    <ds:schemaRef ds:uri="http://schemas.microsoft.com/office/2006/metadata/properties"/>
-    <ds:schemaRef ds:uri="http://schemas.microsoft.com/office/infopath/2007/PartnerControls"/>
-    <ds:schemaRef ds:uri="71af3243-3dd4-4a8d-8c0d-dd76da1f02a5"/>
-  </ds:schemaRefs>
-</ds:datastoreItem>
-</file>
-
 <file path=customXml/itemProps3.xml><?xml version="1.0" encoding="utf-8"?>
 <ds:datastoreItem xmlns:ds="http://schemas.openxmlformats.org/officeDocument/2006/customXml" ds:itemID="{4F44C90D-2A62-4985-9618-3460247437B1}">
   <ds:schemaRefs>
